--- a/public/materialy/1L/6/Prezentace k hodinám/4. Úprava fotografie v GIMPu.pptx
+++ b/public/materialy/1L/6/Prezentace k hodinám/4. Úprava fotografie v GIMPu.pptx
@@ -6380,7 +6380,7 @@
                 </a:solidFill>
                 <a:latin typeface="Calibri"/>
               </a:rPr>
-              <a:t>Ořízni na 16:9 a uprav jas a kontrast. Zapiš použité hodnoty.</a:t>
+              <a:t>Napiš, k čemu fotka bude. Ořízni na 16:9 a uprav jas a kontrast.</a:t>
             </a:r>
           </a:p>
         </p:txBody>
